--- a/output/education/2026-03-30_palliative-home-death-concordance/palliative-home-death-concordance_slides_allstaff.pptx
+++ b/output/education/2026-03-30_palliative-home-death-concordance/palliative-home-death-concordance_slides_allstaff.pptx
@@ -3586,42 +3586,6 @@
             <a:br/>
             <a:r>
               <a:t>希望通りの場所で最期を迎えられましたか？</a:t>
-            </a:r>
-          </a:p>
-        </p:txBody>
-      </p:sp>
-      <p:sp>
-        <p:nvSpPr>
-          <p:cNvPr id="14" name="TextBox 13"/>
-          <p:cNvSpPr txBox="1"/>
-          <p:nvPr/>
-        </p:nvSpPr>
-        <p:spPr>
-          <a:xfrm>
-            <a:off x="6400800" y="4663440"/>
-            <a:ext cx="2743200" cy="274320"/>
-          </a:xfrm>
-          <a:prstGeom prst="rect">
-            <a:avLst/>
-          </a:prstGeom>
-          <a:noFill/>
-        </p:spPr>
-        <p:txBody>
-          <a:bodyPr wrap="square" lIns="45720" rIns="45720" tIns="27432" bIns="27432">
-            <a:spAutoFit/>
-          </a:bodyPr>
-          <a:lstStyle/>
-          <a:p>
-            <a:pPr algn="l">
-              <a:defRPr sz="800" b="0">
-                <a:solidFill>
-                  <a:srgbClr val="8A9E8C"/>
-                </a:solidFill>
-                <a:latin typeface="Calibri"/>
-              </a:defRPr>
-            </a:pPr>
-            <a:r>
-              <a:t>[ガニェ事象1: 注意の獲得]</a:t>
             </a:r>
           </a:p>
         </p:txBody>
@@ -4181,42 +4145,6 @@
           </a:p>
         </p:txBody>
       </p:sp>
-      <p:sp>
-        <p:nvSpPr>
-          <p:cNvPr id="8" name="TextBox 7"/>
-          <p:cNvSpPr txBox="1"/>
-          <p:nvPr/>
-        </p:nvSpPr>
-        <p:spPr>
-          <a:xfrm>
-            <a:off x="4572000" y="4663440"/>
-            <a:ext cx="4572000" cy="274320"/>
-          </a:xfrm>
-          <a:prstGeom prst="rect">
-            <a:avLst/>
-          </a:prstGeom>
-          <a:noFill/>
-        </p:spPr>
-        <p:txBody>
-          <a:bodyPr wrap="square" lIns="45720" rIns="45720" tIns="27432" bIns="27432">
-            <a:spAutoFit/>
-          </a:bodyPr>
-          <a:lstStyle/>
-          <a:p>
-            <a:pPr algn="l">
-              <a:defRPr sz="800" b="0">
-                <a:solidFill>
-                  <a:srgbClr val="8A9E8C"/>
-                </a:solidFill>
-                <a:latin typeface="Calibri"/>
-              </a:defRPr>
-            </a:pPr>
-            <a:r>
-              <a:t>[ガニェ事象8: 学習成果の評価 / 事象9: 保持と転移]</a:t>
-            </a:r>
-          </a:p>
-        </p:txBody>
-      </p:sp>
     </p:spTree>
   </p:cSld>
   <p:clrMapOvr>
@@ -4823,42 +4751,6 @@
           </a:p>
         </p:txBody>
       </p:sp>
-      <p:sp>
-        <p:nvSpPr>
-          <p:cNvPr id="17" name="TextBox 16"/>
-          <p:cNvSpPr txBox="1"/>
-          <p:nvPr/>
-        </p:nvSpPr>
-        <p:spPr>
-          <a:xfrm>
-            <a:off x="6400800" y="4663440"/>
-            <a:ext cx="2743200" cy="274320"/>
-          </a:xfrm>
-          <a:prstGeom prst="rect">
-            <a:avLst/>
-          </a:prstGeom>
-          <a:noFill/>
-        </p:spPr>
-        <p:txBody>
-          <a:bodyPr wrap="square" lIns="45720" rIns="45720" tIns="27432" bIns="27432">
-            <a:spAutoFit/>
-          </a:bodyPr>
-          <a:lstStyle/>
-          <a:p>
-            <a:pPr algn="l">
-              <a:defRPr sz="800" b="0">
-                <a:solidFill>
-                  <a:srgbClr val="8A9E8C"/>
-                </a:solidFill>
-                <a:latin typeface="Calibri"/>
-              </a:defRPr>
-            </a:pPr>
-            <a:r>
-              <a:t>[ガニェ事象2: 学習目標の提示]</a:t>
-            </a:r>
-          </a:p>
-        </p:txBody>
-      </p:sp>
     </p:spTree>
   </p:cSld>
   <p:clrMapOvr>
@@ -5236,42 +5128,6 @@
           </a:p>
         </p:txBody>
       </p:sp>
-      <p:sp>
-        <p:nvSpPr>
-          <p:cNvPr id="11" name="TextBox 10"/>
-          <p:cNvSpPr txBox="1"/>
-          <p:nvPr/>
-        </p:nvSpPr>
-        <p:spPr>
-          <a:xfrm>
-            <a:off x="6400800" y="4663440"/>
-            <a:ext cx="2743200" cy="274320"/>
-          </a:xfrm>
-          <a:prstGeom prst="rect">
-            <a:avLst/>
-          </a:prstGeom>
-          <a:noFill/>
-        </p:spPr>
-        <p:txBody>
-          <a:bodyPr wrap="square" lIns="45720" rIns="45720" tIns="27432" bIns="27432">
-            <a:spAutoFit/>
-          </a:bodyPr>
-          <a:lstStyle/>
-          <a:p>
-            <a:pPr algn="l">
-              <a:defRPr sz="800" b="0">
-                <a:solidFill>
-                  <a:srgbClr val="8A9E8C"/>
-                </a:solidFill>
-                <a:latin typeface="Calibri"/>
-              </a:defRPr>
-            </a:pPr>
-            <a:r>
-              <a:t>[ガニェ事象3: 前提条件の確認]</a:t>
-            </a:r>
-          </a:p>
-        </p:txBody>
-      </p:sp>
     </p:spTree>
   </p:cSld>
   <p:clrMapOvr>
@@ -5843,42 +5699,6 @@
           </a:p>
         </p:txBody>
       </p:sp>
-      <p:sp>
-        <p:nvSpPr>
-          <p:cNvPr id="16" name="TextBox 15"/>
-          <p:cNvSpPr txBox="1"/>
-          <p:nvPr/>
-        </p:nvSpPr>
-        <p:spPr>
-          <a:xfrm>
-            <a:off x="6400800" y="4663440"/>
-            <a:ext cx="2743200" cy="274320"/>
-          </a:xfrm>
-          <a:prstGeom prst="rect">
-            <a:avLst/>
-          </a:prstGeom>
-          <a:noFill/>
-        </p:spPr>
-        <p:txBody>
-          <a:bodyPr wrap="square" lIns="45720" rIns="45720" tIns="27432" bIns="27432">
-            <a:spAutoFit/>
-          </a:bodyPr>
-          <a:lstStyle/>
-          <a:p>
-            <a:pPr algn="l">
-              <a:defRPr sz="800" b="0">
-                <a:solidFill>
-                  <a:srgbClr val="8A9E8C"/>
-                </a:solidFill>
-                <a:latin typeface="Calibri"/>
-              </a:defRPr>
-            </a:pPr>
-            <a:r>
-              <a:t>[ガニェ事象4: 新しい内容の提示]</a:t>
-            </a:r>
-          </a:p>
-        </p:txBody>
-      </p:sp>
     </p:spTree>
   </p:cSld>
   <p:clrMapOvr>
@@ -6343,7 +6163,7 @@
         </p:nvSpPr>
         <p:spPr>
           <a:xfrm>
-            <a:off x="457200" y="3657600"/>
+            <a:off x="457200" y="4023360"/>
             <a:ext cx="8229600" cy="731520"/>
           </a:xfrm>
           <a:prstGeom prst="rect">
@@ -6386,7 +6206,7 @@
         </p:nvSpPr>
         <p:spPr>
           <a:xfrm>
-            <a:off x="640080" y="3703320"/>
+            <a:off x="640080" y="4069080"/>
             <a:ext cx="7772400" cy="640080"/>
           </a:xfrm>
           <a:prstGeom prst="rect">
@@ -6414,42 +6234,6 @@
             <a:br/>
             <a:r>
               <a:t>「病棟の予定だったけど自宅で看取れた」というポジティブな変化もある</a:t>
-            </a:r>
-          </a:p>
-        </p:txBody>
-      </p:sp>
-      <p:sp>
-        <p:nvSpPr>
-          <p:cNvPr id="15" name="TextBox 14"/>
-          <p:cNvSpPr txBox="1"/>
-          <p:nvPr/>
-        </p:nvSpPr>
-        <p:spPr>
-          <a:xfrm>
-            <a:off x="6400800" y="4663440"/>
-            <a:ext cx="2743200" cy="274320"/>
-          </a:xfrm>
-          <a:prstGeom prst="rect">
-            <a:avLst/>
-          </a:prstGeom>
-          <a:noFill/>
-        </p:spPr>
-        <p:txBody>
-          <a:bodyPr wrap="square" lIns="45720" rIns="45720" tIns="27432" bIns="27432">
-            <a:spAutoFit/>
-          </a:bodyPr>
-          <a:lstStyle/>
-          <a:p>
-            <a:pPr algn="l">
-              <a:defRPr sz="800" b="0">
-                <a:solidFill>
-                  <a:srgbClr val="8A9E8C"/>
-                </a:solidFill>
-                <a:latin typeface="Calibri"/>
-              </a:defRPr>
-            </a:pPr>
-            <a:r>
-              <a:t>[ガニェ事象4: 新しい内容の提示（続）]</a:t>
             </a:r>
           </a:p>
         </p:txBody>
@@ -6692,7 +6476,7 @@
         <p:spPr>
           <a:xfrm>
             <a:off x="411479" y="1554480"/>
-            <a:ext cx="2468880" cy="2286000"/>
+            <a:ext cx="2468880" cy="1920240"/>
           </a:xfrm>
           <a:prstGeom prst="rect">
             <a:avLst/>
@@ -6860,7 +6644,7 @@
         <p:spPr>
           <a:xfrm>
             <a:off x="3337560" y="1554480"/>
-            <a:ext cx="2468880" cy="2286000"/>
+            <a:ext cx="2468880" cy="1920240"/>
           </a:xfrm>
           <a:prstGeom prst="rect">
             <a:avLst/>
@@ -7028,7 +6812,7 @@
         <p:spPr>
           <a:xfrm>
             <a:off x="6263640" y="1554480"/>
-            <a:ext cx="2468880" cy="2286000"/>
+            <a:ext cx="2468880" cy="1920240"/>
           </a:xfrm>
           <a:prstGeom prst="rect">
             <a:avLst/>
@@ -7059,42 +6843,6 @@
             <a:br/>
             <a:r>
               <a:t>在宅チーム全体の連携の要</a:t>
-            </a:r>
-          </a:p>
-        </p:txBody>
-      </p:sp>
-      <p:sp>
-        <p:nvSpPr>
-          <p:cNvPr id="16" name="TextBox 15"/>
-          <p:cNvSpPr txBox="1"/>
-          <p:nvPr/>
-        </p:nvSpPr>
-        <p:spPr>
-          <a:xfrm>
-            <a:off x="6400800" y="4663440"/>
-            <a:ext cx="2743200" cy="274320"/>
-          </a:xfrm>
-          <a:prstGeom prst="rect">
-            <a:avLst/>
-          </a:prstGeom>
-          <a:noFill/>
-        </p:spPr>
-        <p:txBody>
-          <a:bodyPr wrap="square" lIns="45720" rIns="45720" tIns="27432" bIns="27432">
-            <a:spAutoFit/>
-          </a:bodyPr>
-          <a:lstStyle/>
-          <a:p>
-            <a:pPr algn="l">
-              <a:defRPr sz="800" b="0">
-                <a:solidFill>
-                  <a:srgbClr val="8A9E8C"/>
-                </a:solidFill>
-                <a:latin typeface="Calibri"/>
-              </a:defRPr>
-            </a:pPr>
-            <a:r>
-              <a:t>[ガニェ事象5: 学習の案内]</a:t>
             </a:r>
           </a:p>
         </p:txBody>
@@ -7337,7 +7085,7 @@
         <p:spPr>
           <a:xfrm>
             <a:off x="594360" y="1554480"/>
-            <a:ext cx="3840480" cy="1645920"/>
+            <a:ext cx="3840480" cy="1371600"/>
           </a:xfrm>
           <a:prstGeom prst="rect">
             <a:avLst/>
@@ -7505,7 +7253,7 @@
         <p:spPr>
           <a:xfrm>
             <a:off x="4983480" y="1554480"/>
-            <a:ext cx="3840480" cy="1645920"/>
+            <a:ext cx="3840480" cy="1371600"/>
           </a:xfrm>
           <a:prstGeom prst="rect">
             <a:avLst/>
@@ -7619,42 +7367,6 @@
             <a:br/>
             <a:r>
               <a:t>でも、最も長い時間を患者さんと過ごすのはあなたです。</a:t>
-            </a:r>
-          </a:p>
-        </p:txBody>
-      </p:sp>
-      <p:sp>
-        <p:nvSpPr>
-          <p:cNvPr id="14" name="TextBox 13"/>
-          <p:cNvSpPr txBox="1"/>
-          <p:nvPr/>
-        </p:nvSpPr>
-        <p:spPr>
-          <a:xfrm>
-            <a:off x="6400800" y="4663440"/>
-            <a:ext cx="2743200" cy="274320"/>
-          </a:xfrm>
-          <a:prstGeom prst="rect">
-            <a:avLst/>
-          </a:prstGeom>
-          <a:noFill/>
-        </p:spPr>
-        <p:txBody>
-          <a:bodyPr wrap="square" lIns="45720" rIns="45720" tIns="27432" bIns="27432">
-            <a:spAutoFit/>
-          </a:bodyPr>
-          <a:lstStyle/>
-          <a:p>
-            <a:pPr algn="l">
-              <a:defRPr sz="800" b="0">
-                <a:solidFill>
-                  <a:srgbClr val="8A9E8C"/>
-                </a:solidFill>
-                <a:latin typeface="Calibri"/>
-              </a:defRPr>
-            </a:pPr>
-            <a:r>
-              <a:t>[ガニェ事象5: 学習の案内（続）]</a:t>
             </a:r>
           </a:p>
         </p:txBody>
@@ -8133,42 +7845,6 @@
           </a:p>
         </p:txBody>
       </p:sp>
-      <p:sp>
-        <p:nvSpPr>
-          <p:cNvPr id="13" name="TextBox 12"/>
-          <p:cNvSpPr txBox="1"/>
-          <p:nvPr/>
-        </p:nvSpPr>
-        <p:spPr>
-          <a:xfrm>
-            <a:off x="6400800" y="4663440"/>
-            <a:ext cx="2743200" cy="274320"/>
-          </a:xfrm>
-          <a:prstGeom prst="rect">
-            <a:avLst/>
-          </a:prstGeom>
-          <a:noFill/>
-        </p:spPr>
-        <p:txBody>
-          <a:bodyPr wrap="square" lIns="45720" rIns="45720" tIns="27432" bIns="27432">
-            <a:spAutoFit/>
-          </a:bodyPr>
-          <a:lstStyle/>
-          <a:p>
-            <a:pPr algn="l">
-              <a:defRPr sz="800" b="0">
-                <a:solidFill>
-                  <a:srgbClr val="8A9E8C"/>
-                </a:solidFill>
-                <a:latin typeface="Calibri"/>
-              </a:defRPr>
-            </a:pPr>
-            <a:r>
-              <a:t>[ガニェ事象6: 練習の実施]</a:t>
-            </a:r>
-          </a:p>
-        </p:txBody>
-      </p:sp>
     </p:spTree>
   </p:cSld>
   <p:clrMapOvr>
@@ -8798,42 +8474,6 @@
             </a:pPr>
             <a:r>
               <a:t>正解はありません。「自分ならこうする」を考えてみてください。</a:t>
-            </a:r>
-          </a:p>
-        </p:txBody>
-      </p:sp>
-      <p:sp>
-        <p:nvSpPr>
-          <p:cNvPr id="17" name="TextBox 16"/>
-          <p:cNvSpPr txBox="1"/>
-          <p:nvPr/>
-        </p:nvSpPr>
-        <p:spPr>
-          <a:xfrm>
-            <a:off x="5029200" y="4663440"/>
-            <a:ext cx="4114800" cy="274320"/>
-          </a:xfrm>
-          <a:prstGeom prst="rect">
-            <a:avLst/>
-          </a:prstGeom>
-          <a:noFill/>
-        </p:spPr>
-        <p:txBody>
-          <a:bodyPr wrap="square" lIns="45720" rIns="45720" tIns="27432" bIns="27432">
-            <a:spAutoFit/>
-          </a:bodyPr>
-          <a:lstStyle/>
-          <a:p>
-            <a:pPr algn="l">
-              <a:defRPr sz="800" b="0">
-                <a:solidFill>
-                  <a:srgbClr val="8A9E8C"/>
-                </a:solidFill>
-                <a:latin typeface="Calibri"/>
-              </a:defRPr>
-            </a:pPr>
-            <a:r>
-              <a:t>[ガニェ事象6: 練習 / 事象7: フィードバック]</a:t>
             </a:r>
           </a:p>
         </p:txBody>

--- a/output/education/2026-03-30_palliative-home-death-concordance/palliative-home-death-concordance_slides_allstaff.pptx
+++ b/output/education/2026-03-30_palliative-home-death-concordance/palliative-home-death-concordance_slides_allstaff.pptx
@@ -6163,8 +6163,8 @@
         </p:nvSpPr>
         <p:spPr>
           <a:xfrm>
-            <a:off x="457200" y="4023360"/>
-            <a:ext cx="8229600" cy="731520"/>
+            <a:off x="457200" y="4160520"/>
+            <a:ext cx="8229600" cy="594360"/>
           </a:xfrm>
           <a:prstGeom prst="rect">
             <a:avLst/>
@@ -6206,8 +6206,8 @@
         </p:nvSpPr>
         <p:spPr>
           <a:xfrm>
-            <a:off x="640080" y="4069080"/>
-            <a:ext cx="7772400" cy="640080"/>
+            <a:off x="640080" y="4206240"/>
+            <a:ext cx="7772400" cy="502920"/>
           </a:xfrm>
           <a:prstGeom prst="rect">
             <a:avLst/>

--- a/output/education/2026-03-30_palliative-home-death-concordance/palliative-home-death-concordance_slides_allstaff.pptx
+++ b/output/education/2026-03-30_palliative-home-death-concordance/palliative-home-death-concordance_slides_allstaff.pptx
@@ -3114,7 +3114,7 @@
         <p:spPr>
           <a:xfrm>
             <a:off x="457200" y="731520"/>
-            <a:ext cx="8229600" cy="548640"/>
+            <a:ext cx="8229600" cy="589279"/>
           </a:xfrm>
           <a:prstGeom prst="rect">
             <a:avLst/>
@@ -3136,6 +3136,7 @@
               </a:defRPr>
             </a:pPr>
             <a:r>
+              <a:rPr/>
               <a:t>最期の場所が「希望通り」であること</a:t>
             </a:r>
           </a:p>
@@ -3150,7 +3151,7 @@
         <p:spPr>
           <a:xfrm>
             <a:off x="457200" y="1371600"/>
-            <a:ext cx="8229600" cy="365760"/>
+            <a:ext cx="8229600" cy="375920"/>
           </a:xfrm>
           <a:prstGeom prst="rect">
             <a:avLst/>
@@ -3172,6 +3173,7 @@
               </a:defRPr>
             </a:pPr>
             <a:r>
+              <a:rPr/>
               <a:t>— 患者さんとご家族にとっての意味 —</a:t>
             </a:r>
           </a:p>
@@ -3216,7 +3218,9 @@
           <a:bodyPr rtlCol="0" anchor="ctr"/>
           <a:lstStyle/>
           <a:p>
-            <a:pPr algn="ctr"/>
+            <a:pPr algn="ctr">
+              <a:defRPr/>
+            </a:pPr>
           </a:p>
         </p:txBody>
       </p:sp>
@@ -3261,7 +3265,9 @@
           <a:bodyPr rtlCol="0" anchor="ctr"/>
           <a:lstStyle/>
           <a:p>
-            <a:pPr algn="ctr"/>
+            <a:pPr algn="ctr">
+              <a:defRPr/>
+            </a:pPr>
           </a:p>
         </p:txBody>
       </p:sp>
@@ -3296,6 +3302,7 @@
               </a:defRPr>
             </a:pPr>
             <a:r>
+              <a:rPr/>
               <a:t>患者さんにとって</a:t>
             </a:r>
           </a:p>
@@ -3332,10 +3339,12 @@
               </a:defRPr>
             </a:pPr>
             <a:r>
+              <a:rPr/>
               <a:t>「自分で選んだ場所で最期を迎えられた」</a:t>
             </a:r>
             <a:br/>
             <a:r>
+              <a:rPr/>
               <a:t>という安心感</a:t>
             </a:r>
           </a:p>
@@ -3382,7 +3391,9 @@
           <a:bodyPr rtlCol="0" anchor="ctr"/>
           <a:lstStyle/>
           <a:p>
-            <a:pPr algn="ctr"/>
+            <a:pPr algn="ctr">
+              <a:defRPr/>
+            </a:pPr>
           </a:p>
         </p:txBody>
       </p:sp>
@@ -3417,6 +3428,7 @@
               </a:defRPr>
             </a:pPr>
             <a:r>
+              <a:rPr/>
               <a:t>ご家族にとって</a:t>
             </a:r>
           </a:p>
@@ -3453,10 +3465,12 @@
               </a:defRPr>
             </a:pPr>
             <a:r>
+              <a:rPr/>
               <a:t>「約束を守れた」という心の支え。</a:t>
             </a:r>
             <a:br/>
             <a:r>
+              <a:rPr/>
               <a:t>逆に不一致は後悔につながることも</a:t>
             </a:r>
           </a:p>
@@ -3501,7 +3515,9 @@
           <a:bodyPr rtlCol="0" anchor="ctr"/>
           <a:lstStyle/>
           <a:p>
-            <a:pPr algn="ctr"/>
+            <a:pPr algn="ctr">
+              <a:defRPr/>
+            </a:pPr>
           </a:p>
         </p:txBody>
       </p:sp>
@@ -3546,7 +3562,9 @@
           <a:bodyPr rtlCol="0" anchor="ctr"/>
           <a:lstStyle/>
           <a:p>
-            <a:pPr algn="ctr"/>
+            <a:pPr algn="ctr">
+              <a:defRPr/>
+            </a:pPr>
           </a:p>
         </p:txBody>
       </p:sp>
@@ -3581,10 +3599,12 @@
               </a:defRPr>
             </a:pPr>
             <a:r>
+              <a:rPr/>
               <a:t>あなたが関わった患者さん・利用者さんは、</a:t>
             </a:r>
             <a:br/>
             <a:r>
+              <a:rPr/>
               <a:t>希望通りの場所で最期を迎えられましたか？</a:t>
             </a:r>
           </a:p>
@@ -3625,7 +3645,7 @@
         <p:spPr>
           <a:xfrm>
             <a:off x="457200" y="274320"/>
-            <a:ext cx="8229600" cy="457200"/>
+            <a:ext cx="8229600" cy="482600"/>
           </a:xfrm>
           <a:prstGeom prst="rect">
             <a:avLst/>
@@ -3647,6 +3667,7 @@
               </a:defRPr>
             </a:pPr>
             <a:r>
+              <a:rPr/>
               <a:t>今日から始める、あなたのアクション</a:t>
             </a:r>
           </a:p>
@@ -3691,7 +3712,9 @@
           <a:bodyPr rtlCol="0" anchor="ctr"/>
           <a:lstStyle/>
           <a:p>
-            <a:pPr algn="ctr"/>
+            <a:pPr algn="ctr">
+              <a:defRPr/>
+            </a:pPr>
           </a:p>
         </p:txBody>
       </p:sp>
@@ -4060,7 +4083,9 @@
           <a:bodyPr rtlCol="0" anchor="ctr"/>
           <a:lstStyle/>
           <a:p>
-            <a:pPr algn="ctr"/>
+            <a:pPr algn="ctr">
+              <a:defRPr/>
+            </a:pPr>
           </a:p>
         </p:txBody>
       </p:sp>
@@ -4105,7 +4130,9 @@
           <a:bodyPr rtlCol="0" anchor="ctr"/>
           <a:lstStyle/>
           <a:p>
-            <a:pPr algn="ctr"/>
+            <a:pPr algn="ctr">
+              <a:defRPr/>
+            </a:pPr>
           </a:p>
         </p:txBody>
       </p:sp>
@@ -4118,7 +4145,7 @@
         <p:spPr>
           <a:xfrm>
             <a:off x="1600200" y="3913632"/>
-            <a:ext cx="6035040" cy="310896"/>
+            <a:ext cx="6035040" cy="340360"/>
           </a:xfrm>
           <a:prstGeom prst="rect">
             <a:avLst/>
@@ -4140,6 +4167,7 @@
               </a:defRPr>
             </a:pPr>
             <a:r>
+              <a:rPr/>
               <a:t>「自分には関係ない」→「自分にもできることがある」</a:t>
             </a:r>
           </a:p>
@@ -4180,7 +4208,7 @@
         <p:spPr>
           <a:xfrm>
             <a:off x="457200" y="274320"/>
-            <a:ext cx="8229600" cy="457200"/>
+            <a:ext cx="8229600" cy="482600"/>
           </a:xfrm>
           <a:prstGeom prst="rect">
             <a:avLst/>
@@ -4202,6 +4230,7 @@
               </a:defRPr>
             </a:pPr>
             <a:r>
+              <a:rPr/>
               <a:t>今日の学習目標</a:t>
             </a:r>
           </a:p>
@@ -4246,7 +4275,9 @@
           <a:bodyPr rtlCol="0" anchor="ctr"/>
           <a:lstStyle/>
           <a:p>
-            <a:pPr algn="ctr"/>
+            <a:pPr algn="ctr">
+              <a:defRPr/>
+            </a:pPr>
           </a:p>
         </p:txBody>
       </p:sp>
@@ -4289,7 +4320,9 @@
           <a:bodyPr rtlCol="0" anchor="ctr"/>
           <a:lstStyle/>
           <a:p>
-            <a:pPr algn="ctr"/>
+            <a:pPr algn="ctr">
+              <a:defRPr/>
+            </a:pPr>
           </a:p>
         </p:txBody>
       </p:sp>
@@ -4324,6 +4357,7 @@
               </a:defRPr>
             </a:pPr>
             <a:r>
+              <a:rPr/>
               <a:t>1</a:t>
             </a:r>
           </a:p>
@@ -4338,7 +4372,7 @@
         <p:spPr>
           <a:xfrm>
             <a:off x="1554480" y="1143000"/>
-            <a:ext cx="2743200" cy="274320"/>
+            <a:ext cx="2743200" cy="301752"/>
           </a:xfrm>
           <a:prstGeom prst="rect">
             <a:avLst/>
@@ -4360,6 +4394,7 @@
               </a:defRPr>
             </a:pPr>
             <a:r>
+              <a:rPr/>
               <a:t>自分の職種の役割</a:t>
             </a:r>
           </a:p>
@@ -4396,10 +4431,12 @@
               </a:defRPr>
             </a:pPr>
             <a:r>
+              <a:rPr/>
               <a:t>場の移行（トランジション）で</a:t>
             </a:r>
             <a:br/>
             <a:r>
+              <a:rPr/>
               <a:t>自分の職種が何をできるか説明できる</a:t>
             </a:r>
           </a:p>
@@ -4444,7 +4481,9 @@
           <a:bodyPr rtlCol="0" anchor="ctr"/>
           <a:lstStyle/>
           <a:p>
-            <a:pPr algn="ctr"/>
+            <a:pPr algn="ctr">
+              <a:defRPr/>
+            </a:pPr>
           </a:p>
         </p:txBody>
       </p:sp>
@@ -4479,6 +4518,7 @@
               </a:defRPr>
             </a:pPr>
             <a:r>
+              <a:rPr/>
               <a:t>2</a:t>
             </a:r>
           </a:p>
@@ -4493,7 +4533,7 @@
         <p:spPr>
           <a:xfrm>
             <a:off x="1554480" y="2331720"/>
-            <a:ext cx="2743200" cy="274320"/>
+            <a:ext cx="2743200" cy="301752"/>
           </a:xfrm>
           <a:prstGeom prst="rect">
             <a:avLst/>
@@ -4515,6 +4555,7 @@
               </a:defRPr>
             </a:pPr>
             <a:r>
+              <a:rPr/>
               <a:t>家族支援</a:t>
             </a:r>
           </a:p>
@@ -4551,10 +4592,12 @@
               </a:defRPr>
             </a:pPr>
             <a:r>
+              <a:rPr/>
               <a:t>ご家族への支援アプローチを</a:t>
             </a:r>
             <a:br/>
             <a:r>
+              <a:rPr/>
               <a:t>3つ挙げられる</a:t>
             </a:r>
           </a:p>
@@ -4599,7 +4642,9 @@
           <a:bodyPr rtlCol="0" anchor="ctr"/>
           <a:lstStyle/>
           <a:p>
-            <a:pPr algn="ctr"/>
+            <a:pPr algn="ctr">
+              <a:defRPr/>
+            </a:pPr>
           </a:p>
         </p:txBody>
       </p:sp>
@@ -4634,6 +4679,7 @@
               </a:defRPr>
             </a:pPr>
             <a:r>
+              <a:rPr/>
               <a:t>3</a:t>
             </a:r>
           </a:p>
@@ -4648,7 +4694,7 @@
         <p:spPr>
           <a:xfrm>
             <a:off x="1554480" y="3520439"/>
-            <a:ext cx="2743200" cy="274320"/>
+            <a:ext cx="2743200" cy="301753"/>
           </a:xfrm>
           <a:prstGeom prst="rect">
             <a:avLst/>
@@ -4670,6 +4716,7 @@
               </a:defRPr>
             </a:pPr>
             <a:r>
+              <a:rPr/>
               <a:t>急変時の連携</a:t>
             </a:r>
           </a:p>
@@ -4706,10 +4753,12 @@
               </a:defRPr>
             </a:pPr>
             <a:r>
+              <a:rPr/>
               <a:t>急変が起きたとき、</a:t>
             </a:r>
             <a:br/>
             <a:r>
+              <a:rPr/>
               <a:t>自分がとるべき行動を理解する</a:t>
             </a:r>
           </a:p>
@@ -4746,6 +4795,7 @@
               </a:defRPr>
             </a:pPr>
             <a:r>
+              <a:rPr/>
               <a:t>すべての職種に関係するテーマです</a:t>
             </a:r>
           </a:p>
@@ -4808,6 +4858,7 @@
               </a:defRPr>
             </a:pPr>
             <a:r>
+              <a:rPr/>
               <a:t>ACP（アドバンス・ケア・プランニング）とは？</a:t>
             </a:r>
           </a:p>
@@ -4852,7 +4903,9 @@
           <a:bodyPr rtlCol="0" anchor="ctr"/>
           <a:lstStyle/>
           <a:p>
-            <a:pPr algn="ctr"/>
+            <a:pPr algn="ctr">
+              <a:defRPr/>
+            </a:pPr>
           </a:p>
         </p:txBody>
       </p:sp>
@@ -4895,7 +4948,9 @@
           <a:bodyPr rtlCol="0" anchor="ctr"/>
           <a:lstStyle/>
           <a:p>
-            <a:pPr algn="ctr"/>
+            <a:pPr algn="ctr">
+              <a:defRPr/>
+            </a:pPr>
           </a:p>
         </p:txBody>
       </p:sp>
@@ -4940,7 +4995,9 @@
           <a:bodyPr rtlCol="0" anchor="ctr"/>
           <a:lstStyle/>
           <a:p>
-            <a:pPr algn="ctr"/>
+            <a:pPr algn="ctr">
+              <a:defRPr/>
+            </a:pPr>
           </a:p>
         </p:txBody>
       </p:sp>
@@ -4975,10 +5032,12 @@
               </a:defRPr>
             </a:pPr>
             <a:r>
+              <a:rPr/>
               <a:t>「これからのことを、本人・ご家族・私たちで</a:t>
             </a:r>
             <a:br/>
             <a:r>
+              <a:rPr/>
               <a:t> 一緒に話し合い続けること」</a:t>
             </a:r>
           </a:p>
@@ -5015,6 +5074,7 @@
               </a:defRPr>
             </a:pPr>
             <a:r>
+              <a:rPr/>
               <a:t>  一度決めたら終わりではなく、状況が変わるたびに何度でも話し合う</a:t>
             </a:r>
           </a:p>
@@ -5051,6 +5111,7 @@
               </a:defRPr>
             </a:pPr>
             <a:r>
+              <a:rPr/>
               <a:t>  「人生会議」という愛称でも知られている</a:t>
             </a:r>
           </a:p>
@@ -5087,6 +5148,7 @@
               </a:defRPr>
             </a:pPr>
             <a:r>
+              <a:rPr/>
               <a:t>  紙に書くことより、対話のプロセスそのものが大切</a:t>
             </a:r>
           </a:p>
@@ -5123,6 +5185,7 @@
               </a:defRPr>
             </a:pPr>
             <a:r>
+              <a:rPr/>
               <a:t>  患者さんの気持ちは変わることがある。だからこそ「繰り返し」が重要</a:t>
             </a:r>
           </a:p>
@@ -5185,6 +5248,7 @@
               </a:defRPr>
             </a:pPr>
             <a:r>
+              <a:rPr/>
               <a:t>研究が教えてくれたこと — 100人の患者さんがいたら</a:t>
             </a:r>
           </a:p>
@@ -5229,7 +5293,9 @@
           <a:bodyPr rtlCol="0" anchor="ctr"/>
           <a:lstStyle/>
           <a:p>
-            <a:pPr algn="ctr"/>
+            <a:pPr algn="ctr">
+              <a:defRPr/>
+            </a:pPr>
           </a:p>
         </p:txBody>
       </p:sp>
@@ -5242,7 +5308,7 @@
         <p:spPr>
           <a:xfrm>
             <a:off x="457200" y="914400"/>
-            <a:ext cx="8229600" cy="274320"/>
+            <a:ext cx="8229600" cy="287020"/>
           </a:xfrm>
           <a:prstGeom prst="rect">
             <a:avLst/>
@@ -5264,6 +5330,7 @@
               </a:defRPr>
             </a:pPr>
             <a:r>
+              <a:rPr/>
               <a:t>緩和ケア病棟から自宅に退院した患者さん359人の遺族への調査（2018年）</a:t>
             </a:r>
           </a:p>
@@ -5308,7 +5375,9 @@
           <a:bodyPr rtlCol="0" anchor="ctr"/>
           <a:lstStyle/>
           <a:p>
-            <a:pPr algn="ctr"/>
+            <a:pPr algn="ctr">
+              <a:defRPr/>
+            </a:pPr>
           </a:p>
         </p:txBody>
       </p:sp>
@@ -5343,6 +5412,7 @@
               </a:defRPr>
             </a:pPr>
             <a:r>
+              <a:rPr/>
               <a:t>自宅で亡くなった方</a:t>
             </a:r>
           </a:p>
@@ -5356,8 +5426,8 @@
         </p:nvSpPr>
         <p:spPr>
           <a:xfrm>
-            <a:off x="457200" y="1737360"/>
-            <a:ext cx="3931920" cy="731520"/>
+            <a:off x="457200" y="1755648"/>
+            <a:ext cx="3931920" cy="804671"/>
           </a:xfrm>
           <a:prstGeom prst="rect">
             <a:avLst/>
@@ -5379,6 +5449,7 @@
               </a:defRPr>
             </a:pPr>
             <a:r>
+              <a:rPr/>
               <a:t>80人</a:t>
             </a:r>
           </a:p>
@@ -5393,7 +5464,7 @@
         <p:spPr>
           <a:xfrm>
             <a:off x="457200" y="2560320"/>
-            <a:ext cx="3931920" cy="274320"/>
+            <a:ext cx="3931920" cy="287020"/>
           </a:xfrm>
           <a:prstGeom prst="rect">
             <a:avLst/>
@@ -5415,6 +5486,7 @@
               </a:defRPr>
             </a:pPr>
             <a:r>
+              <a:rPr/>
               <a:t>100人中、希望通り</a:t>
             </a:r>
           </a:p>
@@ -5459,7 +5531,9 @@
           <a:bodyPr rtlCol="0" anchor="ctr"/>
           <a:lstStyle/>
           <a:p>
-            <a:pPr algn="ctr"/>
+            <a:pPr algn="ctr">
+              <a:defRPr/>
+            </a:pPr>
           </a:p>
         </p:txBody>
       </p:sp>
@@ -5494,6 +5568,7 @@
               </a:defRPr>
             </a:pPr>
             <a:r>
+              <a:rPr/>
               <a:t>緩和ケア病棟で亡くなった方</a:t>
             </a:r>
           </a:p>
@@ -5507,8 +5582,8 @@
         </p:nvSpPr>
         <p:spPr>
           <a:xfrm>
-            <a:off x="4754880" y="1737360"/>
-            <a:ext cx="3931920" cy="731520"/>
+            <a:off x="4754880" y="1755648"/>
+            <a:ext cx="3931920" cy="804671"/>
           </a:xfrm>
           <a:prstGeom prst="rect">
             <a:avLst/>
@@ -5530,6 +5605,7 @@
               </a:defRPr>
             </a:pPr>
             <a:r>
+              <a:rPr/>
               <a:t>82人</a:t>
             </a:r>
           </a:p>
@@ -5544,7 +5620,7 @@
         <p:spPr>
           <a:xfrm>
             <a:off x="4754880" y="2560320"/>
-            <a:ext cx="3931920" cy="274320"/>
+            <a:ext cx="3931920" cy="287020"/>
           </a:xfrm>
           <a:prstGeom prst="rect">
             <a:avLst/>
@@ -5566,6 +5642,7 @@
               </a:defRPr>
             </a:pPr>
             <a:r>
+              <a:rPr/>
               <a:t>100人中、希望通り</a:t>
             </a:r>
           </a:p>
@@ -5610,7 +5687,9 @@
           <a:bodyPr rtlCol="0" anchor="ctr"/>
           <a:lstStyle/>
           <a:p>
-            <a:pPr algn="ctr"/>
+            <a:pPr algn="ctr">
+              <a:defRPr/>
+            </a:pPr>
           </a:p>
         </p:txBody>
       </p:sp>
@@ -5655,7 +5734,9 @@
           <a:bodyPr rtlCol="0" anchor="ctr"/>
           <a:lstStyle/>
           <a:p>
-            <a:pPr algn="ctr"/>
+            <a:pPr algn="ctr">
+              <a:defRPr/>
+            </a:pPr>
           </a:p>
         </p:txBody>
       </p:sp>
@@ -5690,10 +5771,12 @@
               </a:defRPr>
             </a:pPr>
             <a:r>
+              <a:rPr/>
               <a:t>でも裏を返すと…100人のうち約20人は、希望と違う場所で亡くなっています。</a:t>
             </a:r>
             <a:br/>
             <a:r>
+              <a:rPr/>
               <a:t>しかもこれは最も手厚い支援を受けた方たちの数字です。</a:t>
             </a:r>
           </a:p>
@@ -5734,7 +5817,7 @@
         <p:spPr>
           <a:xfrm>
             <a:off x="457200" y="274320"/>
-            <a:ext cx="8229600" cy="457200"/>
+            <a:ext cx="8229600" cy="482600"/>
           </a:xfrm>
           <a:prstGeom prst="rect">
             <a:avLst/>
@@ -5756,6 +5839,7 @@
               </a:defRPr>
             </a:pPr>
             <a:r>
+              <a:rPr/>
               <a:t>なぜ「希望通り」にならないのか</a:t>
             </a:r>
           </a:p>
@@ -5800,7 +5884,9 @@
           <a:bodyPr rtlCol="0" anchor="ctr"/>
           <a:lstStyle/>
           <a:p>
-            <a:pPr algn="ctr"/>
+            <a:pPr algn="ctr">
+              <a:defRPr/>
+            </a:pPr>
           </a:p>
         </p:txBody>
       </p:sp>
@@ -5845,7 +5931,9 @@
           <a:bodyPr rtlCol="0" anchor="ctr"/>
           <a:lstStyle/>
           <a:p>
-            <a:pPr algn="ctr"/>
+            <a:pPr algn="ctr">
+              <a:defRPr/>
+            </a:pPr>
           </a:p>
         </p:txBody>
       </p:sp>
@@ -5880,6 +5968,7 @@
               </a:defRPr>
             </a:pPr>
             <a:r>
+              <a:rPr/>
               <a:t>痛みの管理が難しかった</a:t>
             </a:r>
           </a:p>
@@ -5916,6 +6005,7 @@
               </a:defRPr>
             </a:pPr>
             <a:r>
+              <a:rPr/>
               <a:t>在宅では24時間の対応が難しい場面がある</a:t>
             </a:r>
           </a:p>
@@ -5962,7 +6052,9 @@
           <a:bodyPr rtlCol="0" anchor="ctr"/>
           <a:lstStyle/>
           <a:p>
-            <a:pPr algn="ctr"/>
+            <a:pPr algn="ctr">
+              <a:defRPr/>
+            </a:pPr>
           </a:p>
         </p:txBody>
       </p:sp>
@@ -5997,6 +6089,7 @@
               </a:defRPr>
             </a:pPr>
             <a:r>
+              <a:rPr/>
               <a:t>在宅で対応できる医師がいなかった</a:t>
             </a:r>
           </a:p>
@@ -6033,6 +6126,7 @@
               </a:defRPr>
             </a:pPr>
             <a:r>
+              <a:rPr/>
               <a:t>地域によって医師の数に大きな差がある</a:t>
             </a:r>
           </a:p>
@@ -6079,7 +6173,9 @@
           <a:bodyPr rtlCol="0" anchor="ctr"/>
           <a:lstStyle/>
           <a:p>
-            <a:pPr algn="ctr"/>
+            <a:pPr algn="ctr">
+              <a:defRPr/>
+            </a:pPr>
           </a:p>
         </p:txBody>
       </p:sp>
@@ -6114,6 +6210,7 @@
               </a:defRPr>
             </a:pPr>
             <a:r>
+              <a:rPr/>
               <a:t>ご家族の介護負担が限界を超えた</a:t>
             </a:r>
           </a:p>
@@ -6127,7 +6224,7 @@
         </p:nvSpPr>
         <p:spPr>
           <a:xfrm>
-            <a:off x="640080" y="3474720"/>
+            <a:off x="640080" y="3493008"/>
             <a:ext cx="7772400" cy="365760"/>
           </a:xfrm>
           <a:prstGeom prst="rect">
@@ -6150,6 +6247,7 @@
               </a:defRPr>
             </a:pPr>
             <a:r>
+              <a:rPr/>
               <a:t>「見ていられない」という心理的つらさも</a:t>
             </a:r>
           </a:p>
@@ -6194,7 +6292,9 @@
           <a:bodyPr rtlCol="0" anchor="ctr"/>
           <a:lstStyle/>
           <a:p>
-            <a:pPr algn="ctr"/>
+            <a:pPr algn="ctr">
+              <a:defRPr/>
+            </a:pPr>
           </a:p>
         </p:txBody>
       </p:sp>
@@ -6229,10 +6329,12 @@
               </a:defRPr>
             </a:pPr>
             <a:r>
+              <a:rPr/>
               <a:t>逆のケースも: 在宅医療に対応してくれる医師・看護師が見つかり、</a:t>
             </a:r>
             <a:br/>
             <a:r>
+              <a:rPr/>
               <a:t>「病棟の予定だったけど自宅で看取れた」というポジティブな変化もある</a:t>
             </a:r>
           </a:p>
@@ -6273,7 +6375,7 @@
         <p:spPr>
           <a:xfrm>
             <a:off x="457200" y="274320"/>
-            <a:ext cx="8229600" cy="457200"/>
+            <a:ext cx="8229600" cy="482600"/>
           </a:xfrm>
           <a:prstGeom prst="rect">
             <a:avLst/>
@@ -6295,6 +6397,7 @@
               </a:defRPr>
             </a:pPr>
             <a:r>
+              <a:rPr/>
               <a:t>あなたの職種でできること（1）</a:t>
             </a:r>
           </a:p>
@@ -6339,7 +6442,9 @@
           <a:bodyPr rtlCol="0" anchor="ctr"/>
           <a:lstStyle/>
           <a:p>
-            <a:pPr algn="ctr"/>
+            <a:pPr algn="ctr">
+              <a:defRPr/>
+            </a:pPr>
           </a:p>
         </p:txBody>
       </p:sp>
@@ -6384,7 +6489,9 @@
           <a:bodyPr rtlCol="0" anchor="ctr"/>
           <a:lstStyle/>
           <a:p>
-            <a:pPr algn="ctr"/>
+            <a:pPr algn="ctr">
+              <a:defRPr/>
+            </a:pPr>
           </a:p>
         </p:txBody>
       </p:sp>
@@ -6419,6 +6526,7 @@
               </a:defRPr>
             </a:pPr>
             <a:r>
+              <a:rPr/>
               <a:t>看護師</a:t>
             </a:r>
           </a:p>
@@ -6463,7 +6571,9 @@
           <a:bodyPr rtlCol="0" anchor="ctr"/>
           <a:lstStyle/>
           <a:p>
-            <a:pPr algn="ctr"/>
+            <a:pPr algn="ctr">
+              <a:defRPr/>
+            </a:pPr>
           </a:p>
         </p:txBody>
       </p:sp>
@@ -6498,14 +6608,17 @@
               </a:defRPr>
             </a:pPr>
             <a:r>
+              <a:rPr/>
               <a:t>退院前カンファレンスでの情報引き継ぎ</a:t>
             </a:r>
             <a:br/>
             <a:r>
+              <a:rPr/>
               <a:t>症状変化の早期発見と医師への報告</a:t>
             </a:r>
             <a:br/>
             <a:r>
+              <a:rPr/>
               <a:t>ご家族への症状管理の教育</a:t>
             </a:r>
           </a:p>
@@ -6552,7 +6665,9 @@
           <a:bodyPr rtlCol="0" anchor="ctr"/>
           <a:lstStyle/>
           <a:p>
-            <a:pPr algn="ctr"/>
+            <a:pPr algn="ctr">
+              <a:defRPr/>
+            </a:pPr>
           </a:p>
         </p:txBody>
       </p:sp>
@@ -6587,6 +6702,7 @@
               </a:defRPr>
             </a:pPr>
             <a:r>
+              <a:rPr/>
               <a:t>SW / 医療相談員</a:t>
             </a:r>
           </a:p>
@@ -6631,7 +6747,9 @@
           <a:bodyPr rtlCol="0" anchor="ctr"/>
           <a:lstStyle/>
           <a:p>
-            <a:pPr algn="ctr"/>
+            <a:pPr algn="ctr">
+              <a:defRPr/>
+            </a:pPr>
           </a:p>
         </p:txBody>
       </p:sp>
@@ -6666,14 +6784,17 @@
               </a:defRPr>
             </a:pPr>
             <a:r>
+              <a:rPr/>
               <a:t>在宅サービスの調整</a:t>
             </a:r>
             <a:br/>
             <a:r>
+              <a:rPr/>
               <a:t>ご家族の経済的・社会的不安への対応</a:t>
             </a:r>
             <a:br/>
             <a:r>
+              <a:rPr/>
               <a:t>バックアップベッドの事前確保</a:t>
             </a:r>
           </a:p>
@@ -6720,7 +6841,9 @@
           <a:bodyPr rtlCol="0" anchor="ctr"/>
           <a:lstStyle/>
           <a:p>
-            <a:pPr algn="ctr"/>
+            <a:pPr algn="ctr">
+              <a:defRPr/>
+            </a:pPr>
           </a:p>
         </p:txBody>
       </p:sp>
@@ -6755,6 +6878,7 @@
               </a:defRPr>
             </a:pPr>
             <a:r>
+              <a:rPr/>
               <a:t>ケアマネジャー</a:t>
             </a:r>
           </a:p>
@@ -6799,7 +6923,9 @@
           <a:bodyPr rtlCol="0" anchor="ctr"/>
           <a:lstStyle/>
           <a:p>
-            <a:pPr algn="ctr"/>
+            <a:pPr algn="ctr">
+              <a:defRPr/>
+            </a:pPr>
           </a:p>
         </p:txBody>
       </p:sp>
@@ -6834,14 +6960,17 @@
               </a:defRPr>
             </a:pPr>
             <a:r>
+              <a:rPr/>
               <a:t>介護サービスの迅速な調整</a:t>
             </a:r>
             <a:br/>
             <a:r>
+              <a:rPr/>
               <a:t>ご家族のレスパイト支援の計画</a:t>
             </a:r>
             <a:br/>
             <a:r>
+              <a:rPr/>
               <a:t>在宅チーム全体の連携の要</a:t>
             </a:r>
           </a:p>
@@ -6882,7 +7011,7 @@
         <p:spPr>
           <a:xfrm>
             <a:off x="457200" y="274320"/>
-            <a:ext cx="8229600" cy="457200"/>
+            <a:ext cx="8229600" cy="482600"/>
           </a:xfrm>
           <a:prstGeom prst="rect">
             <a:avLst/>
@@ -6904,6 +7033,7 @@
               </a:defRPr>
             </a:pPr>
             <a:r>
+              <a:rPr/>
               <a:t>あなたの職種でできること（2）</a:t>
             </a:r>
           </a:p>
@@ -6948,7 +7078,9 @@
           <a:bodyPr rtlCol="0" anchor="ctr"/>
           <a:lstStyle/>
           <a:p>
-            <a:pPr algn="ctr"/>
+            <a:pPr algn="ctr">
+              <a:defRPr/>
+            </a:pPr>
           </a:p>
         </p:txBody>
       </p:sp>
@@ -6993,7 +7125,9 @@
           <a:bodyPr rtlCol="0" anchor="ctr"/>
           <a:lstStyle/>
           <a:p>
-            <a:pPr algn="ctr"/>
+            <a:pPr algn="ctr">
+              <a:defRPr/>
+            </a:pPr>
           </a:p>
         </p:txBody>
       </p:sp>
@@ -7028,6 +7162,7 @@
               </a:defRPr>
             </a:pPr>
             <a:r>
+              <a:rPr/>
               <a:t>薬剤師</a:t>
             </a:r>
           </a:p>
@@ -7072,7 +7207,9 @@
           <a:bodyPr rtlCol="0" anchor="ctr"/>
           <a:lstStyle/>
           <a:p>
-            <a:pPr algn="ctr"/>
+            <a:pPr algn="ctr">
+              <a:defRPr/>
+            </a:pPr>
           </a:p>
         </p:txBody>
       </p:sp>
@@ -7107,14 +7244,17 @@
               </a:defRPr>
             </a:pPr>
             <a:r>
+              <a:rPr/>
               <a:t>レスキュー薬の事前配置と使い方の説明</a:t>
             </a:r>
             <a:br/>
             <a:r>
+              <a:rPr/>
               <a:t>服薬管理のサポート</a:t>
             </a:r>
             <a:br/>
             <a:r>
+              <a:rPr/>
               <a:t>医師との薬剤調整の橋渡し</a:t>
             </a:r>
           </a:p>
@@ -7161,7 +7301,9 @@
           <a:bodyPr rtlCol="0" anchor="ctr"/>
           <a:lstStyle/>
           <a:p>
-            <a:pPr algn="ctr"/>
+            <a:pPr algn="ctr">
+              <a:defRPr/>
+            </a:pPr>
           </a:p>
         </p:txBody>
       </p:sp>
@@ -7196,6 +7338,7 @@
               </a:defRPr>
             </a:pPr>
             <a:r>
+              <a:rPr/>
               <a:t>介護職</a:t>
             </a:r>
           </a:p>
@@ -7240,7 +7383,9 @@
           <a:bodyPr rtlCol="0" anchor="ctr"/>
           <a:lstStyle/>
           <a:p>
-            <a:pPr algn="ctr"/>
+            <a:pPr algn="ctr">
+              <a:defRPr/>
+            </a:pPr>
           </a:p>
         </p:txBody>
       </p:sp>
@@ -7275,14 +7420,17 @@
               </a:defRPr>
             </a:pPr>
             <a:r>
+              <a:rPr/>
               <a:t>日々のケアの中での「いつもと違う」の気づき</a:t>
             </a:r>
             <a:br/>
             <a:r>
+              <a:rPr/>
               <a:t>1日8〜16時間一緒にいるからこそ見える変化</a:t>
             </a:r>
             <a:br/>
             <a:r>
+              <a:rPr/>
               <a:t>あなたの「気づき」が医療チームへの大切な情報に</a:t>
             </a:r>
           </a:p>
@@ -7327,7 +7475,9 @@
           <a:bodyPr rtlCol="0" anchor="ctr"/>
           <a:lstStyle/>
           <a:p>
-            <a:pPr algn="ctr"/>
+            <a:pPr algn="ctr">
+              <a:defRPr/>
+            </a:pPr>
           </a:p>
         </p:txBody>
       </p:sp>
@@ -7362,10 +7512,12 @@
               </a:defRPr>
             </a:pPr>
             <a:r>
+              <a:rPr/>
               <a:t>介護職への緩和ケア教育は全国で約10%の施設でしか行われていない。</a:t>
             </a:r>
             <a:br/>
             <a:r>
+              <a:rPr/>
               <a:t>でも、最も長い時間を患者さんと過ごすのはあなたです。</a:t>
             </a:r>
           </a:p>
@@ -7428,6 +7580,7 @@
               </a:defRPr>
             </a:pPr>
             <a:r>
+              <a:rPr/>
               <a:t>ご家族への声かけ — 明日から使える3つのアプローチ</a:t>
             </a:r>
           </a:p>
@@ -7472,7 +7625,9 @@
           <a:bodyPr rtlCol="0" anchor="ctr"/>
           <a:lstStyle/>
           <a:p>
-            <a:pPr algn="ctr"/>
+            <a:pPr algn="ctr">
+              <a:defRPr/>
+            </a:pPr>
           </a:p>
         </p:txBody>
       </p:sp>
@@ -7515,7 +7670,9 @@
           <a:bodyPr rtlCol="0" anchor="ctr"/>
           <a:lstStyle/>
           <a:p>
-            <a:pPr algn="ctr"/>
+            <a:pPr algn="ctr">
+              <a:defRPr/>
+            </a:pPr>
           </a:p>
         </p:txBody>
       </p:sp>
@@ -7550,6 +7707,7 @@
               </a:defRPr>
             </a:pPr>
             <a:r>
+              <a:rPr/>
               <a:t>不安を受け止める</a:t>
             </a:r>
           </a:p>
@@ -7586,14 +7744,17 @@
               </a:defRPr>
             </a:pPr>
             <a:r>
+              <a:rPr/>
               <a:t>「夜、ひとりで見ているのは不安ですよね。</a:t>
             </a:r>
             <a:br/>
             <a:r>
+              <a:rPr/>
               <a:t>何かあったらいつでも連絡してください」</a:t>
             </a:r>
             <a:br/>
             <a:r>
+              <a:rPr/>
               <a:t>「がんばりすぎていませんか？あなたの体も大切です」</a:t>
             </a:r>
           </a:p>
@@ -7638,7 +7799,9 @@
           <a:bodyPr rtlCol="0" anchor="ctr"/>
           <a:lstStyle/>
           <a:p>
-            <a:pPr algn="ctr"/>
+            <a:pPr algn="ctr">
+              <a:defRPr/>
+            </a:pPr>
           </a:p>
         </p:txBody>
       </p:sp>
@@ -7673,6 +7836,7 @@
               </a:defRPr>
             </a:pPr>
             <a:r>
+              <a:rPr/>
               <a:t>急変時に備える</a:t>
             </a:r>
           </a:p>
@@ -7709,14 +7873,17 @@
               </a:defRPr>
             </a:pPr>
             <a:r>
+              <a:rPr/>
               <a:t>「もし急に痛みが強くなったら、まずこのお薬を使って</a:t>
             </a:r>
             <a:br/>
             <a:r>
+              <a:rPr/>
               <a:t>ください。そのあと○○に電話してください」</a:t>
             </a:r>
             <a:br/>
             <a:r>
+              <a:rPr/>
               <a:t>「夜間の連絡先はここに貼っておきますね」</a:t>
             </a:r>
           </a:p>
@@ -7761,7 +7928,9 @@
           <a:bodyPr rtlCol="0" anchor="ctr"/>
           <a:lstStyle/>
           <a:p>
-            <a:pPr algn="ctr"/>
+            <a:pPr algn="ctr">
+              <a:defRPr/>
+            </a:pPr>
           </a:p>
         </p:txBody>
       </p:sp>
@@ -7796,6 +7965,7 @@
               </a:defRPr>
             </a:pPr>
             <a:r>
+              <a:rPr/>
               <a:t>心の準備を支える</a:t>
             </a:r>
           </a:p>
@@ -7832,14 +8002,17 @@
               </a:defRPr>
             </a:pPr>
             <a:r>
+              <a:rPr/>
               <a:t>「ご本人の希望を、改めて確認しておきましょうか」</a:t>
             </a:r>
             <a:br/>
             <a:r>
+              <a:rPr/>
               <a:t>「今のお気持ちを聞かせていただけますか？</a:t>
             </a:r>
             <a:br/>
             <a:r>
+              <a:rPr/>
               <a:t>何でも大丈夫ですよ」</a:t>
             </a:r>
           </a:p>
@@ -7902,6 +8075,7 @@
               </a:defRPr>
             </a:pPr>
             <a:r>
+              <a:rPr/>
               <a:t>グループワーク（5分）「自分の職種でできること」</a:t>
             </a:r>
           </a:p>
@@ -7946,7 +8120,9 @@
           <a:bodyPr rtlCol="0" anchor="ctr"/>
           <a:lstStyle/>
           <a:p>
-            <a:pPr algn="ctr"/>
+            <a:pPr algn="ctr">
+              <a:defRPr/>
+            </a:pPr>
           </a:p>
         </p:txBody>
       </p:sp>
@@ -7989,7 +8165,9 @@
           <a:bodyPr rtlCol="0" anchor="ctr"/>
           <a:lstStyle/>
           <a:p>
-            <a:pPr algn="ctr"/>
+            <a:pPr algn="ctr">
+              <a:defRPr/>
+            </a:pPr>
           </a:p>
         </p:txBody>
       </p:sp>
@@ -8034,7 +8212,9 @@
           <a:bodyPr rtlCol="0" anchor="ctr"/>
           <a:lstStyle/>
           <a:p>
-            <a:pPr algn="ctr"/>
+            <a:pPr algn="ctr">
+              <a:defRPr/>
+            </a:pPr>
           </a:p>
         </p:txBody>
       </p:sp>
@@ -8069,14 +8249,17 @@
               </a:defRPr>
             </a:pPr>
             <a:r>
+              <a:rPr/>
               <a:t>緩和ケア病棟から自宅に戻った患者さんが、</a:t>
             </a:r>
             <a:br/>
             <a:r>
+              <a:rPr/>
               <a:t>希望通りの場所で最期を迎えるために、</a:t>
             </a:r>
             <a:br/>
             <a:r>
+              <a:rPr/>
               <a:t>あなたの職種でできることは何ですか？</a:t>
             </a:r>
           </a:p>
@@ -8091,7 +8274,7 @@
         <p:spPr>
           <a:xfrm>
             <a:off x="457200" y="2468880"/>
-            <a:ext cx="8229600" cy="274320"/>
+            <a:ext cx="8229600" cy="340360"/>
           </a:xfrm>
           <a:prstGeom prst="rect">
             <a:avLst/>
@@ -8113,6 +8296,7 @@
               </a:defRPr>
             </a:pPr>
             <a:r>
+              <a:rPr/>
               <a:t>考えるヒント</a:t>
             </a:r>
           </a:p>
@@ -8159,7 +8343,9 @@
           <a:bodyPr rtlCol="0" anchor="ctr"/>
           <a:lstStyle/>
           <a:p>
-            <a:pPr algn="ctr"/>
+            <a:pPr algn="ctr">
+              <a:defRPr/>
+            </a:pPr>
           </a:p>
         </p:txBody>
       </p:sp>
@@ -8194,6 +8380,7 @@
               </a:defRPr>
             </a:pPr>
             <a:r>
+              <a:rPr/>
               <a:t>退院前にできること</a:t>
             </a:r>
           </a:p>
@@ -8240,7 +8427,9 @@
           <a:bodyPr rtlCol="0" anchor="ctr"/>
           <a:lstStyle/>
           <a:p>
-            <a:pPr algn="ctr"/>
+            <a:pPr algn="ctr">
+              <a:defRPr/>
+            </a:pPr>
           </a:p>
         </p:txBody>
       </p:sp>
@@ -8275,6 +8464,7 @@
               </a:defRPr>
             </a:pPr>
             <a:r>
+              <a:rPr/>
               <a:t>退院直後にできること</a:t>
             </a:r>
           </a:p>
@@ -8321,7 +8511,9 @@
           <a:bodyPr rtlCol="0" anchor="ctr"/>
           <a:lstStyle/>
           <a:p>
-            <a:pPr algn="ctr"/>
+            <a:pPr algn="ctr">
+              <a:defRPr/>
+            </a:pPr>
           </a:p>
         </p:txBody>
       </p:sp>
@@ -8356,6 +8548,7 @@
               </a:defRPr>
             </a:pPr>
             <a:r>
+              <a:rPr/>
               <a:t>在宅療養中にできること</a:t>
             </a:r>
           </a:p>
@@ -8402,7 +8595,9 @@
           <a:bodyPr rtlCol="0" anchor="ctr"/>
           <a:lstStyle/>
           <a:p>
-            <a:pPr algn="ctr"/>
+            <a:pPr algn="ctr">
+              <a:defRPr/>
+            </a:pPr>
           </a:p>
         </p:txBody>
       </p:sp>
@@ -8437,6 +8632,7 @@
               </a:defRPr>
             </a:pPr>
             <a:r>
+              <a:rPr/>
               <a:t>急変時にできること</a:t>
             </a:r>
           </a:p>
@@ -8451,7 +8647,7 @@
         <p:spPr>
           <a:xfrm>
             <a:off x="457200" y="3840480"/>
-            <a:ext cx="8229600" cy="274320"/>
+            <a:ext cx="8229600" cy="304799"/>
           </a:xfrm>
           <a:prstGeom prst="rect">
             <a:avLst/>
@@ -8473,6 +8669,7 @@
               </a:defRPr>
             </a:pPr>
             <a:r>
+              <a:rPr/>
               <a:t>正解はありません。「自分ならこうする」を考えてみてください。</a:t>
             </a:r>
           </a:p>
